--- a/Review2_Presentation (1).pptx
+++ b/Review2_Presentation (1).pptx
@@ -1303,7 +1303,7 @@
         </p:nvSpPr>
         <p:spPr>
           <a:xfrm>
-            <a:off x="0" y="146900"/>
+            <a:off x="0" y="239679"/>
             <a:ext cx="9144000" cy="424166"/>
           </a:xfrm>
           <a:prstGeom prst="rect">
@@ -1312,7 +1312,7 @@
         </p:spPr>
         <p:txBody>
           <a:bodyPr vert="horz" lIns="68580" tIns="34290" rIns="68580" bIns="34290" rtlCol="0" anchor="b">
-            <a:normAutofit/>
+            <a:noAutofit/>
           </a:bodyPr>
           <a:lstStyle>
             <a:defPPr>
@@ -1412,20 +1412,18 @@
           <a:p>
             <a:pPr algn="ctr"/>
             <a:r>
-              <a:rPr lang="en-US" sz="2100" b="1" dirty="0">
-                <a:solidFill>
-                  <a:srgbClr val="0033CC"/>
-                </a:solidFill>
-                <a:latin typeface="Cambria" panose="02040503050406030204" pitchFamily="18" charset="0"/>
-              </a:rPr>
-              <a:t>Project Title</a:t>
-            </a:r>
-            <a:endParaRPr lang="en-IN" sz="2100" b="1" dirty="0">
-              <a:solidFill>
-                <a:srgbClr val="0033CC"/>
-              </a:solidFill>
-              <a:latin typeface="Cambria" panose="02040503050406030204" pitchFamily="18" charset="0"/>
-            </a:endParaRPr>
+              <a:rPr lang="en-IN" sz="1400" b="1" dirty="0"/>
+              <a:t>Artificial Intelligence Capability and Supply Chain Resilience: The Mediating Role of Sustainable Global Sourcing Practices in the Semiconductor Industry — An </a:t>
+            </a:r>
+            <a:r>
+              <a:rPr lang="en-IN" sz="1400" b="1" dirty="0" err="1"/>
+              <a:t>fsQCA</a:t>
+            </a:r>
+            <a:r>
+              <a:rPr lang="en-IN" sz="1400" b="1" dirty="0"/>
+              <a:t> Approach</a:t>
+            </a:r>
+            <a:endParaRPr lang="en-IN" sz="1400" dirty="0"/>
           </a:p>
         </p:txBody>
       </p:sp>
@@ -1746,7 +1744,7 @@
                 </a:solidFill>
                 <a:latin typeface="Cambria" panose="02040503050406030204" pitchFamily="18" charset="0"/>
               </a:rPr>
-              <a:t>Raghav Mahajan       23BME0456</a:t>
+              <a:t>Raghav Mahajan 23BME0456</a:t>
             </a:r>
           </a:p>
           <a:p>
@@ -1758,7 +1756,7 @@
                 </a:solidFill>
                 <a:latin typeface="Cambria" panose="02040503050406030204" pitchFamily="18" charset="0"/>
               </a:rPr>
-              <a:t>Vedant Singh    23BME0442</a:t>
+              <a:t>Vedant Singh 23BME0442</a:t>
             </a:r>
           </a:p>
           <a:p>
@@ -1770,7 +1768,25 @@
                 </a:solidFill>
                 <a:latin typeface="Cambria" panose="02040503050406030204" pitchFamily="18" charset="0"/>
               </a:rPr>
-              <a:t>Dhruv N Paghdar  23BME0302</a:t>
+              <a:t>Dhruv N </a:t>
+            </a:r>
+            <a:r>
+              <a:rPr lang="en-US" sz="1500" dirty="0" err="1">
+                <a:solidFill>
+                  <a:srgbClr val="002060"/>
+                </a:solidFill>
+                <a:latin typeface="Cambria" panose="02040503050406030204" pitchFamily="18" charset="0"/>
+              </a:rPr>
+              <a:t>Paghdar</a:t>
+            </a:r>
+            <a:r>
+              <a:rPr lang="en-US" sz="1500" dirty="0">
+                <a:solidFill>
+                  <a:srgbClr val="002060"/>
+                </a:solidFill>
+                <a:latin typeface="Cambria" panose="02040503050406030204" pitchFamily="18" charset="0"/>
+              </a:rPr>
+              <a:t> 23BME0302</a:t>
             </a:r>
             <a:endParaRPr lang="en-US" sz="1500" i="0" u="none" dirty="0">
               <a:solidFill>
@@ -1958,7 +1974,7 @@
         <p:spPr bwMode="auto">
           <a:xfrm>
             <a:off x="2349637" y="2635589"/>
-            <a:ext cx="4506272" cy="300082"/>
+            <a:ext cx="4506272" cy="323165"/>
           </a:xfrm>
           <a:prstGeom prst="rect">
             <a:avLst/>
@@ -2095,7 +2111,7 @@
                 </a:solidFill>
                 <a:latin typeface="Cambria" panose="02040503050406030204" pitchFamily="18" charset="0"/>
               </a:rPr>
-              <a:t>First Review / Second Review / Final Viva-Voce</a:t>
+              <a:t>Second Review </a:t>
             </a:r>
           </a:p>
         </p:txBody>
@@ -3213,7 +3229,18 @@
                 <a:ea typeface="Calibri" pitchFamily="34" charset="-122"/>
                 <a:cs typeface="Calibri" pitchFamily="34" charset="-120"/>
               </a:rPr>
-              <a:t>735 construct-year cells: 7.8% observed, 15.5% estimated, 76.7% simulated (documented trend model)</a:t>
+              <a:t>735 construct-year cells</a:t>
+            </a:r>
+            <a:r>
+              <a:rPr lang="en-US" sz="1000">
+                <a:solidFill>
+                  <a:srgbClr val="333333"/>
+                </a:solidFill>
+                <a:latin typeface="Calibri" pitchFamily="34" charset="0"/>
+                <a:ea typeface="Calibri" pitchFamily="34" charset="-122"/>
+                <a:cs typeface="Calibri" pitchFamily="34" charset="-120"/>
+              </a:rPr>
+              <a:t>: documented trend model</a:t>
             </a:r>
             <a:endParaRPr lang="en-US" sz="1000" dirty="0"/>
           </a:p>
